--- a/FYP/9.24-pre-最终版.pptx
+++ b/FYP/9.24-pre-最终版.pptx
@@ -17005,13 +17005,379 @@
         <p:spPr>
           <a:xfrm>
             <a:off x="5870575" y="1097280"/>
-            <a:ext cx="6035040" cy="2479965"/>
+            <a:ext cx="6035040" cy="1983510"/>
           </a:xfrm>
           <a:prstGeom prst="rect">
             <a:avLst/>
           </a:prstGeom>
         </p:spPr>
       </p:pic>
+      <p:sp>
+        <p:nvSpPr>
+          <p:cNvPr id="25" name="TextBox 24"/>
+          <p:cNvSpPr txBox="1"/>
+          <p:nvPr/>
+        </p:nvSpPr>
+        <p:spPr>
+          <a:xfrm>
+            <a:off x="5870448" y="3200400"/>
+            <a:ext cx="6035040" cy="237744"/>
+          </a:xfrm>
+          <a:prstGeom prst="rect">
+            <a:avLst/>
+          </a:prstGeom>
+          <a:noFill/>
+        </p:spPr>
+        <p:txBody>
+          <a:bodyPr wrap="square">
+            <a:spAutoFit/>
+          </a:bodyPr>
+          <a:lstStyle/>
+          <a:p>
+            <a:r>
+              <a:rPr sz="1150" b="1">
+                <a:solidFill>
+                  <a:srgbClr val="003D7C"/>
+                </a:solidFill>
+                <a:latin typeface="Arial"/>
+              </a:rPr>
+              <a:t>Go / no-go experiment (weeks 1-3)</a:t>
+            </a:r>
+          </a:p>
+        </p:txBody>
+      </p:sp>
+      <p:sp>
+        <p:nvSpPr>
+          <p:cNvPr id="26" name="Rounded Rectangle 25"/>
+          <p:cNvSpPr/>
+          <p:nvPr/>
+        </p:nvSpPr>
+        <p:spPr>
+          <a:xfrm>
+            <a:off x="5870448" y="3456432"/>
+            <a:ext cx="2980944" cy="402336"/>
+          </a:xfrm>
+          <a:prstGeom prst="roundRect">
+            <a:avLst/>
+          </a:prstGeom>
+          <a:solidFill>
+            <a:srgbClr val="EFF5FB"/>
+          </a:solidFill>
+          <a:ln w="9525">
+            <a:solidFill>
+              <a:srgbClr val="CFE0F2"/>
+            </a:solidFill>
+          </a:ln>
+          <a:effectLst/>
+        </p:spPr>
+        <p:style>
+          <a:lnRef idx="1">
+            <a:schemeClr val="accent1"/>
+          </a:lnRef>
+          <a:fillRef idx="3">
+            <a:schemeClr val="accent1"/>
+          </a:fillRef>
+          <a:effectRef idx="2">
+            <a:schemeClr val="accent1"/>
+          </a:effectRef>
+          <a:fontRef idx="minor">
+            <a:schemeClr val="lt1"/>
+          </a:fontRef>
+        </p:style>
+        <p:txBody>
+          <a:bodyPr rtlCol="0" anchor="ctr" wrap="square" lIns="82296" rIns="82296" tIns="18288" bIns="18288"/>
+          <a:lstStyle/>
+          <a:p>
+            <a:pPr algn="l"/>
+            <a:r>
+              <a:rPr sz="1000" b="1">
+                <a:solidFill>
+                  <a:srgbClr val="003D7C"/>
+                </a:solidFill>
+                <a:latin typeface="Arial"/>
+              </a:rPr>
+              <a:t>Potential-step dissolution scan</a:t>
+            </a:r>
+          </a:p>
+          <a:p>
+            <a:pPr algn="l"/>
+            <a:r>
+              <a:rPr sz="900" b="0">
+                <a:solidFill>
+                  <a:srgbClr val="5B6572"/>
+                </a:solidFill>
+                <a:latin typeface="Arial"/>
+              </a:rPr>
+              <a:t>1.40 → 1.90 V vs RHE</a:t>
+            </a:r>
+          </a:p>
+        </p:txBody>
+      </p:sp>
+      <p:sp>
+        <p:nvSpPr>
+          <p:cNvPr id="27" name="Rounded Rectangle 26"/>
+          <p:cNvSpPr/>
+          <p:nvPr/>
+        </p:nvSpPr>
+        <p:spPr>
+          <a:xfrm>
+            <a:off x="8924544" y="3456432"/>
+            <a:ext cx="2980944" cy="402336"/>
+          </a:xfrm>
+          <a:prstGeom prst="roundRect">
+            <a:avLst/>
+          </a:prstGeom>
+          <a:solidFill>
+            <a:srgbClr val="EFF5FB"/>
+          </a:solidFill>
+          <a:ln w="9525">
+            <a:solidFill>
+              <a:srgbClr val="CFE0F2"/>
+            </a:solidFill>
+          </a:ln>
+          <a:effectLst/>
+        </p:spPr>
+        <p:style>
+          <a:lnRef idx="1">
+            <a:schemeClr val="accent1"/>
+          </a:lnRef>
+          <a:fillRef idx="3">
+            <a:schemeClr val="accent1"/>
+          </a:fillRef>
+          <a:effectRef idx="2">
+            <a:schemeClr val="accent1"/>
+          </a:effectRef>
+          <a:fontRef idx="minor">
+            <a:schemeClr val="lt1"/>
+          </a:fontRef>
+        </p:style>
+        <p:txBody>
+          <a:bodyPr rtlCol="0" anchor="ctr" wrap="square" lIns="82296" rIns="82296" tIns="18288" bIns="18288"/>
+          <a:lstStyle/>
+          <a:p>
+            <a:pPr algn="l"/>
+            <a:r>
+              <a:rPr sz="1000" b="1">
+                <a:solidFill>
+                  <a:srgbClr val="003D7C"/>
+                </a:solidFill>
+                <a:latin typeface="Arial"/>
+              </a:rPr>
+              <a:t>Segmented ICP-MS</a:t>
+            </a:r>
+          </a:p>
+          <a:p>
+            <a:pPr algn="l"/>
+            <a:r>
+              <a:rPr sz="900" b="0">
+                <a:solidFill>
+                  <a:srgbClr val="5B6572"/>
+                </a:solidFill>
+                <a:latin typeface="Arial"/>
+              </a:rPr>
+              <a:t>Ru and Mn measured separately</a:t>
+            </a:r>
+          </a:p>
+        </p:txBody>
+      </p:sp>
+      <p:sp>
+        <p:nvSpPr>
+          <p:cNvPr id="28" name="Rounded Rectangle 27"/>
+          <p:cNvSpPr/>
+          <p:nvPr/>
+        </p:nvSpPr>
+        <p:spPr>
+          <a:xfrm>
+            <a:off x="5870448" y="3913632"/>
+            <a:ext cx="2980944" cy="402336"/>
+          </a:xfrm>
+          <a:prstGeom prst="roundRect">
+            <a:avLst/>
+          </a:prstGeom>
+          <a:solidFill>
+            <a:srgbClr val="EFF5FB"/>
+          </a:solidFill>
+          <a:ln w="9525">
+            <a:solidFill>
+              <a:srgbClr val="CFE0F2"/>
+            </a:solidFill>
+          </a:ln>
+          <a:effectLst/>
+        </p:spPr>
+        <p:style>
+          <a:lnRef idx="1">
+            <a:schemeClr val="accent1"/>
+          </a:lnRef>
+          <a:fillRef idx="3">
+            <a:schemeClr val="accent1"/>
+          </a:fillRef>
+          <a:effectRef idx="2">
+            <a:schemeClr val="accent1"/>
+          </a:effectRef>
+          <a:fontRef idx="minor">
+            <a:schemeClr val="lt1"/>
+          </a:fontRef>
+        </p:style>
+        <p:txBody>
+          <a:bodyPr rtlCol="0" anchor="ctr" wrap="square" lIns="82296" rIns="82296" tIns="18288" bIns="18288"/>
+          <a:lstStyle/>
+          <a:p>
+            <a:pPr algn="l"/>
+            <a:r>
+              <a:rPr sz="1000" b="1">
+                <a:solidFill>
+                  <a:srgbClr val="003D7C"/>
+                </a:solidFill>
+                <a:latin typeface="Arial"/>
+              </a:rPr>
+              <a:t>In-situ Raman</a:t>
+            </a:r>
+          </a:p>
+          <a:p>
+            <a:pPr algn="l"/>
+            <a:r>
+              <a:rPr sz="900" b="0">
+                <a:solidFill>
+                  <a:srgbClr val="5B6572"/>
+                </a:solidFill>
+                <a:latin typeface="Arial"/>
+              </a:rPr>
+              <a:t>permanganate band (~839 cm-1)</a:t>
+            </a:r>
+          </a:p>
+        </p:txBody>
+      </p:sp>
+      <p:sp>
+        <p:nvSpPr>
+          <p:cNvPr id="29" name="Rounded Rectangle 28"/>
+          <p:cNvSpPr/>
+          <p:nvPr/>
+        </p:nvSpPr>
+        <p:spPr>
+          <a:xfrm>
+            <a:off x="8924544" y="3913632"/>
+            <a:ext cx="2980944" cy="402336"/>
+          </a:xfrm>
+          <a:prstGeom prst="roundRect">
+            <a:avLst/>
+          </a:prstGeom>
+          <a:solidFill>
+            <a:srgbClr val="EFF5FB"/>
+          </a:solidFill>
+          <a:ln w="9525">
+            <a:solidFill>
+              <a:srgbClr val="CFE0F2"/>
+            </a:solidFill>
+          </a:ln>
+          <a:effectLst/>
+        </p:spPr>
+        <p:style>
+          <a:lnRef idx="1">
+            <a:schemeClr val="accent1"/>
+          </a:lnRef>
+          <a:fillRef idx="3">
+            <a:schemeClr val="accent1"/>
+          </a:fillRef>
+          <a:effectRef idx="2">
+            <a:schemeClr val="accent1"/>
+          </a:effectRef>
+          <a:fontRef idx="minor">
+            <a:schemeClr val="lt1"/>
+          </a:fontRef>
+        </p:style>
+        <p:txBody>
+          <a:bodyPr rtlCol="0" anchor="ctr" wrap="square" lIns="82296" rIns="82296" tIns="18288" bIns="18288"/>
+          <a:lstStyle/>
+          <a:p>
+            <a:pPr algn="l"/>
+            <a:r>
+              <a:rPr sz="1000" b="1">
+                <a:solidFill>
+                  <a:srgbClr val="003D7C"/>
+                </a:solidFill>
+                <a:latin typeface="Arial"/>
+              </a:rPr>
+              <a:t>Four controls</a:t>
+            </a:r>
+          </a:p>
+          <a:p>
+            <a:pPr algn="l"/>
+            <a:r>
+              <a:rPr sz="900" b="0">
+                <a:solidFill>
+                  <a:srgbClr val="5B6572"/>
+                </a:solidFill>
+                <a:latin typeface="Arial"/>
+              </a:rPr>
+              <a:t>MnO2 only · RuO2 · impregnated · substituted</a:t>
+            </a:r>
+          </a:p>
+        </p:txBody>
+      </p:sp>
+      <p:sp>
+        <p:nvSpPr>
+          <p:cNvPr id="30" name="Rounded Rectangle 29"/>
+          <p:cNvSpPr/>
+          <p:nvPr/>
+        </p:nvSpPr>
+        <p:spPr>
+          <a:xfrm>
+            <a:off x="5870448" y="4425696"/>
+            <a:ext cx="6035040" cy="384048"/>
+          </a:xfrm>
+          <a:prstGeom prst="roundRect">
+            <a:avLst/>
+          </a:prstGeom>
+          <a:solidFill>
+            <a:srgbClr val="FFF3E6"/>
+          </a:solidFill>
+          <a:ln w="11430">
+            <a:solidFill>
+              <a:srgbClr val="EF7C00"/>
+            </a:solidFill>
+          </a:ln>
+          <a:effectLst/>
+        </p:spPr>
+        <p:style>
+          <a:lnRef idx="1">
+            <a:schemeClr val="accent1"/>
+          </a:lnRef>
+          <a:fillRef idx="3">
+            <a:schemeClr val="accent1"/>
+          </a:fillRef>
+          <a:effectRef idx="2">
+            <a:schemeClr val="accent1"/>
+          </a:effectRef>
+          <a:fontRef idx="minor">
+            <a:schemeClr val="lt1"/>
+          </a:fontRef>
+        </p:style>
+        <p:txBody>
+          <a:bodyPr rtlCol="0" anchor="ctr" wrap="square" tIns="18288" bIns="18288"/>
+          <a:lstStyle/>
+          <a:p>
+            <a:pPr algn="l"/>
+            <a:r>
+              <a:rPr sz="1000" b="1">
+                <a:solidFill>
+                  <a:srgbClr val="003D7C"/>
+                </a:solidFill>
+                <a:latin typeface="Arial"/>
+              </a:rPr>
+              <a:t>Decision rule:  </a:t>
+            </a:r>
+            <a:r>
+              <a:rPr sz="950">
+                <a:solidFill>
+                  <a:srgbClr val="1F2937"/>
+                </a:solidFill>
+                <a:latin typeface="Arial"/>
+              </a:rPr>
+              <a:t>if Mn dissolves much faster than Ru and cannot be suppressed → change phase, or dope Ru first.</a:t>
+            </a:r>
+          </a:p>
+        </p:txBody>
+      </p:sp>
     </p:spTree>
   </p:cSld>
   <p:clrMapOvr>
